--- a/public/fun/pack/pptx/reviewpro/보장점검양식프리미엄_11_본인점검_플럼샴페인.pptx
+++ b/public/fun/pack/pptx/reviewpro/보장점검양식프리미엄_11_본인점검_플럼샴페인.pptx
@@ -112,12 +112,12 @@
   <p:extLst>
     <p:ext uri="{521415D9-36F7-43E2-AB2F-B90AF26B5E84}">
       <p14:sectionLst xmlns:p14="http://schemas.microsoft.com/office/powerpoint/2010/main">
-        <p14:section name="시작" id="{EDEEDB15-DC27-466D-AA16-520E8260DC02}">
+        <p14:section name="시작" id="{B9C1172A-82C1-4A3E-BBA8-558BE452E521}">
           <p14:sldIdLst>
             <p14:sldId id="256"/>
           </p14:sldIdLst>
         </p14:section>
-        <p14:section name="본문" id="{76130C3A-EC0B-451F-B79C-099A79348498}">
+        <p14:section name="본문" id="{1FA2FE24-8912-4611-B643-000AA8840ABF}">
           <p14:sldIdLst>
             <p14:sldId id="257"/>
             <p14:sldId id="258"/>
@@ -1691,7 +1691,7 @@
             </a:lvl1pPr>
           </a:lstStyle>
           <a:p>
-            <a:fld id="{E3ECEEF0-6DC4-411E-9B0D-57E74BA0F9E0}" type="slidenum">
+            <a:fld id="{C8ECF4F9-D39A-448D-BA43-FF142DC6AD5B}" type="slidenum">
               <a:rPr lang="en-US"/>
               <a:t>‹#›</a:t>
             </a:fld>
@@ -2433,7 +2433,7 @@
             </a:lvl1pPr>
           </a:lstStyle>
           <a:p>
-            <a:fld id="{FDEAD301-5CA2-4F97-9F0A-72AE0D497332}" type="slidenum">
+            <a:fld id="{05C57DB0-E6DE-420F-A5AE-BC61146A463A}" type="slidenum">
               <a:rPr lang="en-US"/>
               <a:t>‹#›</a:t>
             </a:fld>
@@ -3059,7 +3059,7 @@
             </a:lvl1pPr>
           </a:lstStyle>
           <a:p>
-            <a:fld id="{10376277-E778-4810-B72F-EF08E92D9470}" type="slidenum">
+            <a:fld id="{D6657894-F190-4265-BACB-F90C994FA033}" type="slidenum">
               <a:rPr lang="en-US"/>
               <a:t>‹#›</a:t>
             </a:fld>
@@ -3890,7 +3890,7 @@
           <a:p>
             <a:r>
               <a:rPr lang="ko-KR"/>
-              <a:t>봄맞이 정리하듯 서류부터 모읍니다</a:t>
+              <a:t>대청소하듯 서류부터 모읍니다</a:t>
             </a:r>
           </a:p>
         </p:txBody>
@@ -3912,7 +3912,7 @@
           <a:p>
             <a:r>
               <a:rPr lang="ko-KR"/>
-              <a:t>본인 점검 · 0000. 00. 00</a:t>
+              <a:t>본인 점검 · 날짜 입력</a:t>
             </a:r>
           </a:p>
           <a:p>
@@ -4003,7 +4003,7 @@
           <a:bodyPr/>
           <a:lstStyle/>
           <a:p>
-            <a:fld id="{AD25675F-0AEF-48AA-B3DC-2D349C9492B7}" type="slidenum">
+            <a:fld id="{2FD684F7-11E6-4089-B353-49E797C8A012}" type="slidenum">
               <a:rPr lang="en-US"/>
               <a:t>‹#›</a:t>
             </a:fld>
@@ -4519,7 +4519,7 @@
           <a:bodyPr/>
           <a:lstStyle/>
           <a:p>
-            <a:fld id="{6C45C40F-8D47-47BD-BEAE-97F0F88EDC1B}" type="slidenum">
+            <a:fld id="{DE105376-E6F3-4B23-8912-586AB85A1AA1}" type="slidenum">
               <a:rPr lang="en-US"/>
               <a:t>‹#›</a:t>
             </a:fld>
@@ -6025,7 +6025,7 @@
           <a:bodyPr/>
           <a:lstStyle/>
           <a:p>
-            <a:fld id="{3EF3C530-9007-4012-9607-0DBFABE3A205}" type="slidenum">
+            <a:fld id="{13520E74-A08C-4F06-89F7-255DE2A46EF4}" type="slidenum">
               <a:rPr lang="en-US"/>
               <a:t>‹#›</a:t>
             </a:fld>
@@ -7575,7 +7575,7 @@
           <a:bodyPr/>
           <a:lstStyle/>
           <a:p>
-            <a:fld id="{B396FA9D-F917-4CED-B67A-14381A38B56C}" type="slidenum">
+            <a:fld id="{B5778905-57E2-4D66-A192-82E3AE5A6A7B}" type="slidenum">
               <a:rPr lang="en-US"/>
               <a:t>‹#›</a:t>
             </a:fld>
@@ -8446,7 +8446,7 @@
           <a:bodyPr/>
           <a:lstStyle/>
           <a:p>
-            <a:fld id="{A521A644-5FB7-44C4-8C0A-D3E6D4583397}" type="slidenum">
+            <a:fld id="{80662796-4D5A-4E06-86DC-DF2BAF0E5E93}" type="slidenum">
               <a:rPr lang="en-US"/>
               <a:t>‹#›</a:t>
             </a:fld>
